--- a/Foundation_F1/Workshop/F1-W05_Apply_Workshop_L09-L10_Sign_Makers_for_Our_Town.pptx
+++ b/Foundation_F1/Workshop/F1-W05_Apply_Workshop_L09-L10_Sign_Makers_for_Our_Town.pptx
@@ -6812,7 +6812,7 @@
                 <a:latin typeface="Calibri" pitchFamily="34" charset="0"/>
                 <a:cs typeface="Amiri" pitchFamily="2" charset="-78"/>
               </a:rPr>
-              <a:t>ends in </a:t>
+              <a:t>ends in ‏</a:t>
             </a:r>
             <a:pPr algn="l" indent="0" marL="0">
               <a:buNone/>
@@ -6839,7 +6839,7 @@
                 <a:latin typeface="Calibri" pitchFamily="34" charset="0"/>
                 <a:cs typeface="Amiri" pitchFamily="2" charset="-78"/>
               </a:rPr>
-              <a:t> (alif maqṣūra)</a:t>
+              <a:t>‏ (alif maqṣūra)</a:t>
             </a:r>
             <a:endParaRPr lang="en-US" sz="1100" dirty="0"/>
           </a:p>
@@ -17431,7 +17431,7 @@
                 <a:latin typeface="Calibri" pitchFamily="34" charset="0"/>
                 <a:cs typeface="Amiri" pitchFamily="2" charset="-78"/>
               </a:rPr>
-              <a:t>kh-r-j = going out: exit. </a:t>
+              <a:t>kh-r-j = going out: exit. ‏</a:t>
             </a:r>
             <a:pPr algn="l" indent="0" marL="0">
               <a:buNone/>
@@ -17458,7 +17458,7 @@
                 <a:latin typeface="Calibri" pitchFamily="34" charset="0"/>
                 <a:cs typeface="Amiri" pitchFamily="2" charset="-78"/>
               </a:rPr>
-              <a:t> = entrance.</a:t>
+              <a:t>‏ = entrance.</a:t>
             </a:r>
             <a:endParaRPr lang="en-US" sz="1150" dirty="0"/>
           </a:p>
@@ -17669,7 +17669,7 @@
                 <a:latin typeface="Calibri" pitchFamily="34" charset="0"/>
                 <a:cs typeface="Amiri" pitchFamily="2" charset="-78"/>
               </a:rPr>
-              <a:t>Feminine ending </a:t>
+              <a:t>Feminine ending ‏</a:t>
             </a:r>
             <a:pPr algn="l" indent="0" marL="0">
               <a:buNone/>
@@ -17696,7 +17696,7 @@
                 <a:latin typeface="Calibri" pitchFamily="34" charset="0"/>
                 <a:cs typeface="Amiri" pitchFamily="2" charset="-78"/>
               </a:rPr>
-              <a:t> has two dots.</a:t>
+              <a:t>‏ has two dots.</a:t>
             </a:r>
             <a:endParaRPr lang="en-US" sz="1150" dirty="0"/>
           </a:p>
